--- a/output/figure4_editable/20261013-161131-Figure4_architecture_selection/final/Figure4_architecture_selection_edited.pptx
+++ b/output/figure4_editable/20261013-161131-Figure4_architecture_selection/final/Figure4_architecture_selection_edited.pptx
@@ -104,6 +104,11 @@
       </a:defRPr>
     </a:lvl9pPr>
   </p:defaultTextStyle>
+  <p:extLst>
+    <p:ext uri="{EFAFB233-063F-42B5-8137-9DF3F51BA10A}">
+      <p15:sldGuideLst xmlns:p15="http://schemas.microsoft.com/office/powerpoint/2012/main"/>
+    </p:ext>
+  </p:extLst>
 </p:presentation>
 </file>
 
@@ -3839,7 +3844,7 @@
           <a:p>
             <a:pPr algn="l"/>
             <a:r>
-              <a:rPr lang="zh-CN" sz="620" dirty="0">
+              <a:rPr lang="zh-CN" sz="600" dirty="0">
                 <a:solidFill>
                   <a:srgbClr val="172127"/>
                 </a:solidFill>
@@ -3849,7 +3854,7 @@
               </a:rPr>
               <a:t>Note: Phase 1 judgment is a hard constraint; Phase 2 is a preferred recommendation, practice can be balanced with team capabilities &amp; budget constraints.</a:t>
             </a:r>
-            <a:endParaRPr lang="zh-CN" sz="620" dirty="0"/>
+            <a:endParaRPr lang="zh-CN" sz="600" dirty="0"/>
           </a:p>
         </p:txBody>
       </p:sp>
